--- a/media/exports/reports/2026-08/growth-trades.pptx
+++ b/media/exports/reports/2026-08/growth-trades.pptx
@@ -243,73 +243,73 @@
                 <c:formatCode>$#,##0;[Red]($#,##0);"-"</c:formatCode>
                 <c:ptCount val="23"/>
                 <c:pt idx="0">
-                  <c:v>171009</c:v>
+                  <c:v>191014</c:v>
                 </c:pt>
                 <c:pt idx="1">
-                  <c:v>179474</c:v>
+                  <c:v>200124</c:v>
                 </c:pt>
                 <c:pt idx="2">
-                  <c:v>143156</c:v>
+                  <c:v>159406</c:v>
                 </c:pt>
                 <c:pt idx="3">
-                  <c:v>140909</c:v>
+                  <c:v>156794</c:v>
                 </c:pt>
                 <c:pt idx="4">
-                  <c:v>160943</c:v>
+                  <c:v>179190</c:v>
                 </c:pt>
                 <c:pt idx="5">
-                  <c:v>135082</c:v>
+                  <c:v>150465</c:v>
                 </c:pt>
                 <c:pt idx="6">
-                  <c:v>124705</c:v>
+                  <c:v>138865</c:v>
                 </c:pt>
                 <c:pt idx="7">
-                  <c:v>129816</c:v>
+                  <c:v>144649</c:v>
                 </c:pt>
                 <c:pt idx="8">
-                  <c:v>164113</c:v>
+                  <c:v>183265</c:v>
                 </c:pt>
                 <c:pt idx="9">
-                  <c:v>186760</c:v>
+                  <c:v>208588</c:v>
                 </c:pt>
                 <c:pt idx="10">
-                  <c:v>139164</c:v>
+                  <c:v>155118</c:v>
                 </c:pt>
                 <c:pt idx="11">
-                  <c:v>128255</c:v>
+                  <c:v>143077</c:v>
                 </c:pt>
                 <c:pt idx="12">
-                  <c:v>128898</c:v>
+                  <c:v>143566</c:v>
                 </c:pt>
                 <c:pt idx="13">
-                  <c:v>174786</c:v>
+                  <c:v>194966</c:v>
                 </c:pt>
                 <c:pt idx="14">
-                  <c:v>135079</c:v>
+                  <c:v>150283</c:v>
                 </c:pt>
                 <c:pt idx="15">
-                  <c:v>164780</c:v>
+                  <c:v>183306</c:v>
                 </c:pt>
                 <c:pt idx="16">
-                  <c:v>196372</c:v>
+                  <c:v>218908</c:v>
                 </c:pt>
                 <c:pt idx="17">
-                  <c:v>191500</c:v>
+                  <c:v>213578</c:v>
                 </c:pt>
                 <c:pt idx="18">
-                  <c:v>164987</c:v>
+                  <c:v>183967</c:v>
                 </c:pt>
                 <c:pt idx="19">
-                  <c:v>161963</c:v>
+                  <c:v>180342</c:v>
                 </c:pt>
                 <c:pt idx="20">
-                  <c:v>173163</c:v>
+                  <c:v>193032</c:v>
                 </c:pt>
                 <c:pt idx="21">
-                  <c:v>193245</c:v>
+                  <c:v>215610</c:v>
                 </c:pt>
                 <c:pt idx="22">
-                  <c:v>179007</c:v>
+                  <c:v>199523</c:v>
                 </c:pt>
               </c:numCache>
             </c:numRef>
@@ -549,73 +549,73 @@
                 <c:formatCode>$#,##0;[Red]($#,##0);"-"</c:formatCode>
                 <c:ptCount val="23"/>
                 <c:pt idx="0">
-                  <c:v>24670</c:v>
+                  <c:v>27650</c:v>
                 </c:pt>
                 <c:pt idx="1">
-                  <c:v>24670</c:v>
+                  <c:v>27650</c:v>
                 </c:pt>
                 <c:pt idx="2">
-                  <c:v>24670</c:v>
+                  <c:v>27650</c:v>
                 </c:pt>
                 <c:pt idx="3">
-                  <c:v>24670</c:v>
+                  <c:v>27650</c:v>
                 </c:pt>
                 <c:pt idx="4">
-                  <c:v>27930</c:v>
+                  <c:v>31300</c:v>
                 </c:pt>
                 <c:pt idx="5">
-                  <c:v>27930</c:v>
+                  <c:v>31300</c:v>
                 </c:pt>
                 <c:pt idx="6">
-                  <c:v>27930</c:v>
+                  <c:v>31300</c:v>
                 </c:pt>
                 <c:pt idx="7">
-                  <c:v>27930</c:v>
+                  <c:v>31300</c:v>
                 </c:pt>
                 <c:pt idx="8">
-                  <c:v>31870</c:v>
+                  <c:v>35720</c:v>
                 </c:pt>
                 <c:pt idx="9">
-                  <c:v>33200</c:v>
+                  <c:v>37200</c:v>
                 </c:pt>
                 <c:pt idx="10">
-                  <c:v>33200</c:v>
+                  <c:v>37200</c:v>
                 </c:pt>
                 <c:pt idx="11">
-                  <c:v>33200</c:v>
+                  <c:v>37200</c:v>
                 </c:pt>
                 <c:pt idx="12">
-                  <c:v>35800</c:v>
+                  <c:v>40100</c:v>
                 </c:pt>
                 <c:pt idx="13">
-                  <c:v>35800</c:v>
+                  <c:v>40100</c:v>
                 </c:pt>
                 <c:pt idx="14">
-                  <c:v>35800</c:v>
+                  <c:v>40100</c:v>
                 </c:pt>
                 <c:pt idx="15">
-                  <c:v>35800</c:v>
+                  <c:v>40100</c:v>
                 </c:pt>
                 <c:pt idx="16">
-                  <c:v>37500</c:v>
+                  <c:v>42000</c:v>
                 </c:pt>
                 <c:pt idx="17">
-                  <c:v>37500</c:v>
+                  <c:v>42000</c:v>
                 </c:pt>
                 <c:pt idx="18">
-                  <c:v>37500</c:v>
+                  <c:v>42000</c:v>
                 </c:pt>
                 <c:pt idx="19">
-                  <c:v>40500</c:v>
+                  <c:v>45350</c:v>
                 </c:pt>
                 <c:pt idx="20">
-                  <c:v>40500</c:v>
+                  <c:v>45350</c:v>
                 </c:pt>
                 <c:pt idx="21">
-                  <c:v>40500</c:v>
+                  <c:v>45350</c:v>
                 </c:pt>
                 <c:pt idx="22">
-                  <c:v>40500</c:v>
+                  <c:v>45350</c:v>
                 </c:pt>
               </c:numCache>
             </c:numRef>
@@ -855,73 +855,73 @@
                 <c:formatCode>$#,##0;[Red]($#,##0);"-"</c:formatCode>
                 <c:ptCount val="23"/>
                 <c:pt idx="0">
+                  <c:v>141600</c:v>
+                </c:pt>
+                <c:pt idx="1">
+                  <c:v>147100</c:v>
+                </c:pt>
+                <c:pt idx="2">
+                  <c:v>103700</c:v>
+                </c:pt>
+                <c:pt idx="3">
+                  <c:v>100100</c:v>
+                </c:pt>
+                <c:pt idx="4">
+                  <c:v>118600</c:v>
+                </c:pt>
+                <c:pt idx="5">
+                  <c:v>96400</c:v>
+                </c:pt>
+                <c:pt idx="6">
+                  <c:v>83900</c:v>
+                </c:pt>
+                <c:pt idx="7">
+                  <c:v>89900</c:v>
+                </c:pt>
+                <c:pt idx="8">
                   <c:v>126300</c:v>
                 </c:pt>
-                <c:pt idx="1">
-                  <c:v>131400</c:v>
-                </c:pt>
-                <c:pt idx="2">
-                  <c:v>92600</c:v>
-                </c:pt>
-                <c:pt idx="3">
-                  <c:v>89400</c:v>
-                </c:pt>
-                <c:pt idx="4">
-                  <c:v>106000</c:v>
-                </c:pt>
-                <c:pt idx="5">
-                  <c:v>86100</c:v>
-                </c:pt>
-                <c:pt idx="6">
-                  <c:v>74900</c:v>
-                </c:pt>
-                <c:pt idx="7">
-                  <c:v>80300</c:v>
-                </c:pt>
-                <c:pt idx="8">
-                  <c:v>112700</c:v>
-                </c:pt>
                 <c:pt idx="9">
-                  <c:v>135800</c:v>
+                  <c:v>152100</c:v>
                 </c:pt>
                 <c:pt idx="10">
-                  <c:v>86200</c:v>
+                  <c:v>96500</c:v>
                 </c:pt>
                 <c:pt idx="11">
-                  <c:v>75100</c:v>
+                  <c:v>84200</c:v>
                 </c:pt>
                 <c:pt idx="12">
-                  <c:v>70800</c:v>
+                  <c:v>79300</c:v>
                 </c:pt>
                 <c:pt idx="13">
-                  <c:v>113300</c:v>
+                  <c:v>126900</c:v>
                 </c:pt>
                 <c:pt idx="14">
-                  <c:v>69700</c:v>
+                  <c:v>78100</c:v>
                 </c:pt>
                 <c:pt idx="15">
-                  <c:v>97500</c:v>
+                  <c:v>109100</c:v>
                 </c:pt>
                 <c:pt idx="16">
-                  <c:v>129300</c:v>
+                  <c:v>144800</c:v>
                 </c:pt>
                 <c:pt idx="17">
-                  <c:v>129400</c:v>
+                  <c:v>144900</c:v>
                 </c:pt>
                 <c:pt idx="18">
-                  <c:v>104400</c:v>
+                  <c:v>116900</c:v>
                 </c:pt>
                 <c:pt idx="19">
-                  <c:v>92400</c:v>
+                  <c:v>103400</c:v>
                 </c:pt>
                 <c:pt idx="20">
-                  <c:v>103200</c:v>
+                  <c:v>115600</c:v>
                 </c:pt>
                 <c:pt idx="21">
-                  <c:v>127600</c:v>
+                  <c:v>143000</c:v>
                 </c:pt>
                 <c:pt idx="22">
-                  <c:v>109600</c:v>
+                  <c:v>122800</c:v>
                 </c:pt>
               </c:numCache>
             </c:numRef>
@@ -970,7 +970,7 @@
         <c:axId val="-2100718248"/>
         <c:scaling>
           <c:orientation val="minMax"/>
-          <c:max val="150000.0"/>
+          <c:max val="200000.0"/>
           <c:min val="0.0"/>
         </c:scaling>
         <c:delete val="0"/>
@@ -1161,73 +1161,73 @@
                 <c:formatCode>$#,##0;[Red]($#,##0);"-"</c:formatCode>
                 <c:ptCount val="23"/>
                 <c:pt idx="0">
-                  <c:v>20039</c:v>
+                  <c:v>21764</c:v>
                 </c:pt>
                 <c:pt idx="1">
-                  <c:v>23404</c:v>
+                  <c:v>25374</c:v>
                 </c:pt>
                 <c:pt idx="2">
-                  <c:v>25886</c:v>
+                  <c:v>28056</c:v>
                 </c:pt>
                 <c:pt idx="3">
-                  <c:v>26839</c:v>
+                  <c:v>29044</c:v>
                 </c:pt>
                 <c:pt idx="4">
-                  <c:v>27013</c:v>
+                  <c:v>29290</c:v>
                 </c:pt>
                 <c:pt idx="5">
-                  <c:v>21052</c:v>
+                  <c:v>22765</c:v>
                 </c:pt>
                 <c:pt idx="6">
-                  <c:v>21875</c:v>
+                  <c:v>23665</c:v>
                 </c:pt>
                 <c:pt idx="7">
-                  <c:v>21586</c:v>
+                  <c:v>23449</c:v>
                 </c:pt>
                 <c:pt idx="8">
-                  <c:v>19543</c:v>
+                  <c:v>21245</c:v>
                 </c:pt>
                 <c:pt idx="9">
-                  <c:v>17760</c:v>
+                  <c:v>19288</c:v>
                 </c:pt>
                 <c:pt idx="10">
-                  <c:v>19764</c:v>
+                  <c:v>21418</c:v>
                 </c:pt>
                 <c:pt idx="11">
-                  <c:v>19955</c:v>
+                  <c:v>21677</c:v>
                 </c:pt>
                 <c:pt idx="12">
-                  <c:v>22298</c:v>
+                  <c:v>24166</c:v>
                 </c:pt>
                 <c:pt idx="13">
-                  <c:v>25686</c:v>
+                  <c:v>27966</c:v>
                 </c:pt>
                 <c:pt idx="14">
-                  <c:v>29579</c:v>
+                  <c:v>32083</c:v>
                 </c:pt>
                 <c:pt idx="15">
-                  <c:v>31480</c:v>
+                  <c:v>34106</c:v>
                 </c:pt>
                 <c:pt idx="16">
-                  <c:v>29572</c:v>
+                  <c:v>32108</c:v>
                 </c:pt>
                 <c:pt idx="17">
-                  <c:v>24600</c:v>
+                  <c:v>26678</c:v>
                 </c:pt>
                 <c:pt idx="18">
-                  <c:v>23087</c:v>
+                  <c:v>25067</c:v>
                 </c:pt>
                 <c:pt idx="19">
-                  <c:v>29063</c:v>
+                  <c:v>31592</c:v>
                 </c:pt>
                 <c:pt idx="20">
-                  <c:v>29463</c:v>
+                  <c:v>32082</c:v>
                 </c:pt>
                 <c:pt idx="21">
-                  <c:v>25145</c:v>
+                  <c:v>27260</c:v>
                 </c:pt>
                 <c:pt idx="22">
-                  <c:v>28907</c:v>
+                  <c:v>31373</c:v>
                 </c:pt>
               </c:numCache>
             </c:numRef>
@@ -1801,7 +1801,7 @@
           <a:lstStyle/>
           <a:p>
             <a:r>
-              <a:t>Trades · All. August against August last year: 28.6%; Year to date against the same period last year: 14.2%; Gross margin, year to date: 38.9%. Revenue is 14.2% up on the same period last year, year to date ($372,252 against $325,924). Maintenance contracts make the highest gross margin (59.5%); Installations the lowest (30.8%). The business needs 38.9% gross margin just to cover overheads. Installations: 30.8% gross margin, 4.2 points under the 35.0% target: about $10,060 on $237,200 of revenue this financial year to date. It's below the 38.9% needed to cover overheads, too. Maintenance contracts: 59.5% gross margin, 24.5 points over the 35.0% target ($19,882 ahead on $81,000 this financial year to date).</a:t>
+              <a:t>Trades · All. August against August last year: 28.6%; Year to date against the same period last year: 14.1%; Gross margin, year to date: 45.2%. Revenue is 14.1% up on the same period last year, year to date ($415,133 against $363,706). Maintenance contracts make the highest gross margin (63.9%); Installations the lowest (38.2%). The business needs 43.8% gross margin just to cover overheads. Installations: 38.2% gross margin, 3.2 points over the 35.0% target ($8,530 ahead on $265,800 this financial year to date). Maintenance contracts: 63.9% gross margin, 28.9 points over the 35.0% target ($26,187 ahead on $90,700 this financial year to date).</a:t>
             </a:r>
           </a:p>
         </p:txBody>
@@ -1871,7 +1871,7 @@
           <a:lstStyle/>
           <a:p>
             <a:r>
-              <a:t>Trades · Maintenance contracts. August against August last year: 22.0%; Year to date against the same period last year: 22.0%; Gross margin, year to date: 59.5%. Maintenance contracts brought in $81,000 this financial year to date, 22.0% on the same period last year (faster than the business as a whole, 14.2%), at a 59.5% gross margin (above the 38.9% overall). Maintenance contracts: 59.5% gross margin, 24.5 points over the 35.0% target ($19,882 ahead on $81,000 this financial year to date).</a:t>
+              <a:t>Trades · Maintenance contracts. August against August last year: 21.9%; Year to date against the same period last year: 21.9%; Gross margin, year to date: 63.9%. Maintenance contracts brought in $90,700 this financial year to date, 21.9% on the same period last year (faster than the business as a whole, 14.1%), at a 63.9% gross margin (above the 45.2% overall). Maintenance contracts: 63.9% gross margin, 28.9 points over the 35.0% target ($26,187 ahead on $90,700 this financial year to date).</a:t>
             </a:r>
           </a:p>
         </p:txBody>
@@ -1941,7 +1941,7 @@
           <a:lstStyle/>
           <a:p>
             <a:r>
-              <a:t>Trades · Installations. August against August last year: 27.1%; Year to date against the same period last year: 6.8%; Gross margin, year to date: 30.8%. Installations brought in $237,200 this financial year to date, 6.8% on the same period last year (slower than the business as a whole, 14.2%), at a 30.8% gross margin (below the 38.9% overall). Installations: 30.8% gross margin, 4.2 points under the 35.0% target: about $10,060 on $237,200 of revenue this financial year to date. It's below the 38.9% needed to cover overheads, too.</a:t>
+              <a:t>Trades · Installations. August against August last year: 27.3%; Year to date against the same period last year: 6.9%; Gross margin, year to date: 38.2%. Installations brought in $265,800 this financial year to date, 6.9% on the same period last year (slower than the business as a whole, 14.1%), at a 38.2% gross margin (below the 45.2% overall). Installations: 38.2% gross margin, 3.2 points over the 35.0% target ($8,530 ahead on $265,800 this financial year to date).</a:t>
             </a:r>
           </a:p>
         </p:txBody>
@@ -2011,7 +2011,7 @@
           <a:lstStyle/>
           <a:p>
             <a:r>
-              <a:t>Trades · Call-outs and repairs. August against August last year: 46.3%; Year to date against the same period last year: 44.0%; Gross margin, year to date: 43.6%. Call-outs and repairs brought in $54,052 this financial year to date, 44.0% on the same period last year (faster than the business as a whole, 14.2%), at a 43.6% gross margin (above the 38.9% overall). Call-outs and repairs: 43.6% gross margin, 8.6 points over the 35.0% target ($4,648 ahead on $54,052 this financial year to date).</a:t>
+              <a:t>Trades · Call-outs and repairs. August against August last year: 46.5%; Year to date against the same period last year: 44.0%; Gross margin, year to date: 48.0%. Call-outs and repairs brought in $58,633 this financial year to date, 44.0% on the same period last year (faster than the business as a whole, 14.1%), at a 48.0% gross margin (above the 45.2% overall). Call-outs and repairs: 48.0% gross margin, 13.0 points over the 35.0% target ($7,625 ahead on $58,633 this financial year to date).</a:t>
             </a:r>
           </a:p>
         </p:txBody>
@@ -2081,7 +2081,7 @@
           <a:lstStyle/>
           <a:p>
             <a:r>
-              <a:t>By line: financial year to date (Jul to Aug 2026) against the same period last year · Trades. From gross margin to profit: August's jobs made $73,637 gross margin (41.1%). Technician time not charged to jobs took $10,060 and overheads $59,500, leaving $4,077 profit before tax (2.3% of revenue). To cover overheads, jobs need a 38.9% gross margin on average.</a:t>
+              <a:t>By line: financial year to date (Jul to Aug 2026) against the same period last year · Trades. From gross margin to profit: August's jobs made $94,153 gross margin (47.2%). Technician time not charged to jobs took $27,812 and overheads $59,500, leaving $6,841 profit before tax (3.4% of revenue). To cover overheads, jobs need a 43.8% gross margin on average.</a:t>
             </a:r>
           </a:p>
         </p:txBody>
@@ -5496,7 +5496,7 @@
                 </a:solidFill>
                 <a:latin typeface="Roboto"/>
               </a:rPr>
-              <a:t>Data retrieved 2pm, Tue 6 Oct 2026 · Generated 8 Oct 2026, 9:35am · Sample data · Made with Python (python-pptx)</a:t>
+              <a:t>Data retrieved 2pm, Tue 6 Oct 2026 · Generated 9 Oct 2026, 8:41am · Sample data · Made with Python (python-pptx)</a:t>
             </a:r>
           </a:p>
         </p:txBody>
@@ -5881,7 +5881,7 @@
                 </a:solidFill>
                 <a:latin typeface="Roboto"/>
               </a:rPr>
-              <a:t>$179,007 against $139,164</a:t>
+              <a:t>$199,523 against $155,118</a:t>
             </a:r>
           </a:p>
         </p:txBody>
@@ -6008,7 +6008,7 @@
                 </a:solidFill>
                 <a:latin typeface="Roboto"/>
               </a:rPr>
-              <a:t>14.2%</a:t>
+              <a:t>14.1%</a:t>
             </a:r>
           </a:p>
         </p:txBody>
@@ -6047,7 +6047,7 @@
                 </a:solidFill>
                 <a:latin typeface="Roboto"/>
               </a:rPr>
-              <a:t>$372,252 against $325,924</a:t>
+              <a:t>$415,133 against $363,706</a:t>
             </a:r>
           </a:p>
         </p:txBody>
@@ -6174,7 +6174,7 @@
                 </a:solidFill>
                 <a:latin typeface="Roboto"/>
               </a:rPr>
-              <a:t>38.9%</a:t>
+              <a:t>45.2%</a:t>
             </a:r>
           </a:p>
         </p:txBody>
@@ -6213,7 +6213,7 @@
                 </a:solidFill>
                 <a:latin typeface="Roboto"/>
               </a:rPr>
-              <a:t>$144,758 before overheads</a:t>
+              <a:t>$187,639 before overheads</a:t>
             </a:r>
           </a:p>
         </p:txBody>
@@ -6228,7 +6228,7 @@
         </p:nvGraphicFramePr>
         <p:xfrm>
           <a:off x="457200" y="2604516"/>
-          <a:ext cx="11277295" cy="2119884"/>
+          <a:ext cx="11277295" cy="2318004"/>
         </p:xfrm>
         <a:graphic>
           <a:graphicData uri="http://schemas.openxmlformats.org/drawingml/2006/chart">
@@ -6244,8 +6244,8 @@
         </p:nvSpPr>
         <p:spPr>
           <a:xfrm>
-            <a:off x="457200" y="4815840"/>
-            <a:ext cx="5501487" cy="1493520"/>
+            <a:off x="457200" y="5013960"/>
+            <a:ext cx="5501487" cy="1295400"/>
           </a:xfrm>
           <a:prstGeom prst="rect">
             <a:avLst/>
@@ -6293,7 +6293,7 @@
         </p:nvSpPr>
         <p:spPr>
           <a:xfrm>
-            <a:off x="594360" y="4870704"/>
+            <a:off x="594360" y="5068824"/>
             <a:ext cx="5227167" cy="274320"/>
           </a:xfrm>
           <a:prstGeom prst="rect">
@@ -6332,8 +6332,8 @@
         </p:nvSpPr>
         <p:spPr>
           <a:xfrm>
-            <a:off x="594360" y="5145024"/>
-            <a:ext cx="5227167" cy="1127760"/>
+            <a:off x="594360" y="5343144"/>
+            <a:ext cx="5227167" cy="929640"/>
           </a:xfrm>
           <a:prstGeom prst="rect">
             <a:avLst/>
@@ -6358,7 +6358,7 @@
                 </a:solidFill>
                 <a:latin typeface="Roboto"/>
               </a:rPr>
-              <a:t>Revenue is 14.2% up on the same period last year, year to date ($372,252 against $325,924). Maintenance contracts make the highest gross margin (59.5%); Installations the lowest (30.8%). The business needs 38.9% gross margin just to cover overheads.</a:t>
+              <a:t>Revenue is 14.1% up on the same period last year, year to date ($415,133 against $363,706). Maintenance contracts make the highest gross margin (63.9%); Installations the lowest (38.2%). The business needs 43.8% gross margin just to cover overheads.</a:t>
             </a:r>
           </a:p>
         </p:txBody>
@@ -6371,8 +6371,8 @@
         </p:nvSpPr>
         <p:spPr>
           <a:xfrm>
-            <a:off x="6233007" y="4815840"/>
-            <a:ext cx="5501487" cy="1493520"/>
+            <a:off x="6233007" y="5013960"/>
+            <a:ext cx="5501487" cy="1295400"/>
           </a:xfrm>
           <a:prstGeom prst="rect">
             <a:avLst/>
@@ -6420,7 +6420,7 @@
         </p:nvSpPr>
         <p:spPr>
           <a:xfrm>
-            <a:off x="6370167" y="4870704"/>
+            <a:off x="6370167" y="5068824"/>
             <a:ext cx="5227167" cy="274320"/>
           </a:xfrm>
           <a:prstGeom prst="rect">
@@ -6459,8 +6459,8 @@
         </p:nvSpPr>
         <p:spPr>
           <a:xfrm>
-            <a:off x="6370167" y="5145024"/>
-            <a:ext cx="5227167" cy="1127760"/>
+            <a:off x="6370167" y="5343144"/>
+            <a:ext cx="5227167" cy="929640"/>
           </a:xfrm>
           <a:prstGeom prst="rect">
             <a:avLst/>
@@ -6485,7 +6485,7 @@
                 </a:solidFill>
                 <a:latin typeface="Roboto"/>
               </a:rPr>
-              <a:t>Installations: 30.8% gross margin, 4.2 points under the 35.0% target: about $10,060 on $237,200 of revenue this financial year to date. It's below the 38.9% needed to cover overheads, too. Maintenance contracts: 59.5% gross margin, 24.5 points over the 35.0% target ($19,882 ahead on $81,000 this financial year to date).</a:t>
+              <a:t>Installations: 38.2% gross margin, 3.2 points over the 35.0% target ($8,530 ahead on $265,800 this financial year to date). Maintenance contracts: 63.9% gross margin, 28.9 points over the 35.0% target ($26,187 ahead on $90,700 this financial year to date).</a:t>
             </a:r>
           </a:p>
         </p:txBody>
@@ -6563,7 +6563,7 @@
                 </a:solidFill>
                 <a:latin typeface="Roboto"/>
               </a:rPr>
-              <a:t>Data retrieved 2pm, Tue 6 Oct 2026 · Generated 8 Oct 2026, 9:35am · Sample data · Made with Python (python-pptx)</a:t>
+              <a:t>Data retrieved 2pm, Tue 6 Oct 2026 · Generated 9 Oct 2026, 8:41am · Sample data · Made with Python (python-pptx)</a:t>
             </a:r>
           </a:p>
         </p:txBody>
@@ -6909,7 +6909,7 @@
                 </a:solidFill>
                 <a:latin typeface="Roboto"/>
               </a:rPr>
-              <a:t>22.0%</a:t>
+              <a:t>21.9%</a:t>
             </a:r>
           </a:p>
         </p:txBody>
@@ -6948,7 +6948,7 @@
                 </a:solidFill>
                 <a:latin typeface="Roboto"/>
               </a:rPr>
-              <a:t>$40,500 against $33,200</a:t>
+              <a:t>$45,350 against $37,200</a:t>
             </a:r>
           </a:p>
         </p:txBody>
@@ -7075,7 +7075,7 @@
                 </a:solidFill>
                 <a:latin typeface="Roboto"/>
               </a:rPr>
-              <a:t>22.0%</a:t>
+              <a:t>21.9%</a:t>
             </a:r>
           </a:p>
         </p:txBody>
@@ -7114,7 +7114,7 @@
                 </a:solidFill>
                 <a:latin typeface="Roboto"/>
               </a:rPr>
-              <a:t>$81,000 against $66,400</a:t>
+              <a:t>$90,700 against $74,400</a:t>
             </a:r>
           </a:p>
         </p:txBody>
@@ -7241,7 +7241,7 @@
                 </a:solidFill>
                 <a:latin typeface="Roboto"/>
               </a:rPr>
-              <a:t>59.5%</a:t>
+              <a:t>63.9%</a:t>
             </a:r>
           </a:p>
         </p:txBody>
@@ -7280,7 +7280,7 @@
                 </a:solidFill>
                 <a:latin typeface="Roboto"/>
               </a:rPr>
-              <a:t>$48,232 before overheads</a:t>
+              <a:t>$57,932 before overheads</a:t>
             </a:r>
           </a:p>
         </p:txBody>
@@ -7425,7 +7425,7 @@
                 </a:solidFill>
                 <a:latin typeface="Roboto"/>
               </a:rPr>
-              <a:t>Maintenance contracts brought in $81,000 this financial year to date, 22.0% on the same period last year (faster than the business as a whole, 14.2%), at a 59.5% gross margin (above the 38.9% overall).</a:t>
+              <a:t>Maintenance contracts brought in $90,700 this financial year to date, 21.9% on the same period last year (faster than the business as a whole, 14.1%), at a 63.9% gross margin (above the 45.2% overall).</a:t>
             </a:r>
           </a:p>
         </p:txBody>
@@ -7552,7 +7552,7 @@
                 </a:solidFill>
                 <a:latin typeface="Roboto"/>
               </a:rPr>
-              <a:t>Maintenance contracts: 59.5% gross margin, 24.5 points over the 35.0% target ($19,882 ahead on $81,000 this financial year to date).</a:t>
+              <a:t>Maintenance contracts: 63.9% gross margin, 28.9 points over the 35.0% target ($26,187 ahead on $90,700 this financial year to date).</a:t>
             </a:r>
           </a:p>
         </p:txBody>
@@ -7630,7 +7630,7 @@
                 </a:solidFill>
                 <a:latin typeface="Roboto"/>
               </a:rPr>
-              <a:t>Data retrieved 2pm, Tue 6 Oct 2026 · Generated 8 Oct 2026, 9:35am · Sample data · Made with Python (python-pptx)</a:t>
+              <a:t>Data retrieved 2pm, Tue 6 Oct 2026 · Generated 9 Oct 2026, 8:41am · Sample data · Made with Python (python-pptx)</a:t>
             </a:r>
           </a:p>
         </p:txBody>
@@ -7976,7 +7976,7 @@
                 </a:solidFill>
                 <a:latin typeface="Roboto"/>
               </a:rPr>
-              <a:t>27.1%</a:t>
+              <a:t>27.3%</a:t>
             </a:r>
           </a:p>
         </p:txBody>
@@ -8015,7 +8015,7 @@
                 </a:solidFill>
                 <a:latin typeface="Roboto"/>
               </a:rPr>
-              <a:t>$109,600 against $86,200</a:t>
+              <a:t>$122,800 against $96,500</a:t>
             </a:r>
           </a:p>
         </p:txBody>
@@ -8142,7 +8142,7 @@
                 </a:solidFill>
                 <a:latin typeface="Roboto"/>
               </a:rPr>
-              <a:t>6.8%</a:t>
+              <a:t>6.9%</a:t>
             </a:r>
           </a:p>
         </p:txBody>
@@ -8181,7 +8181,7 @@
                 </a:solidFill>
                 <a:latin typeface="Roboto"/>
               </a:rPr>
-              <a:t>$237,200 against $222,000</a:t>
+              <a:t>$265,800 against $248,600</a:t>
             </a:r>
           </a:p>
         </p:txBody>
@@ -8308,7 +8308,7 @@
                 </a:solidFill>
                 <a:latin typeface="Roboto"/>
               </a:rPr>
-              <a:t>30.8%</a:t>
+              <a:t>38.2%</a:t>
             </a:r>
           </a:p>
         </p:txBody>
@@ -8347,7 +8347,7 @@
                 </a:solidFill>
                 <a:latin typeface="Roboto"/>
               </a:rPr>
-              <a:t>$72,960 before overheads</a:t>
+              <a:t>$101,560 before overheads</a:t>
             </a:r>
           </a:p>
         </p:txBody>
@@ -8492,7 +8492,7 @@
                 </a:solidFill>
                 <a:latin typeface="Roboto"/>
               </a:rPr>
-              <a:t>Installations brought in $237,200 this financial year to date, 6.8% on the same period last year (slower than the business as a whole, 14.2%), at a 30.8% gross margin (below the 38.9% overall).</a:t>
+              <a:t>Installations brought in $265,800 this financial year to date, 6.9% on the same period last year (slower than the business as a whole, 14.1%), at a 38.2% gross margin (below the 45.2% overall).</a:t>
             </a:r>
           </a:p>
         </p:txBody>
@@ -8619,7 +8619,7 @@
                 </a:solidFill>
                 <a:latin typeface="Roboto"/>
               </a:rPr>
-              <a:t>Installations: 30.8% gross margin, 4.2 points under the 35.0% target: about $10,060 on $237,200 of revenue this financial year to date. It's below the 38.9% needed to cover overheads, too.</a:t>
+              <a:t>Installations: 38.2% gross margin, 3.2 points over the 35.0% target ($8,530 ahead on $265,800 this financial year to date).</a:t>
             </a:r>
           </a:p>
         </p:txBody>
@@ -8697,7 +8697,7 @@
                 </a:solidFill>
                 <a:latin typeface="Roboto"/>
               </a:rPr>
-              <a:t>Data retrieved 2pm, Tue 6 Oct 2026 · Generated 8 Oct 2026, 9:35am · Sample data · Made with Python (python-pptx)</a:t>
+              <a:t>Data retrieved 2pm, Tue 6 Oct 2026 · Generated 9 Oct 2026, 8:41am · Sample data · Made with Python (python-pptx)</a:t>
             </a:r>
           </a:p>
         </p:txBody>
@@ -9043,7 +9043,7 @@
                 </a:solidFill>
                 <a:latin typeface="Roboto"/>
               </a:rPr>
-              <a:t>46.3%</a:t>
+              <a:t>46.5%</a:t>
             </a:r>
           </a:p>
         </p:txBody>
@@ -9082,7 +9082,7 @@
                 </a:solidFill>
                 <a:latin typeface="Roboto"/>
               </a:rPr>
-              <a:t>$28,907 against $19,764</a:t>
+              <a:t>$31,373 against $21,418</a:t>
             </a:r>
           </a:p>
         </p:txBody>
@@ -9248,7 +9248,7 @@
                 </a:solidFill>
                 <a:latin typeface="Roboto"/>
               </a:rPr>
-              <a:t>$54,052 against $37,524</a:t>
+              <a:t>$58,633 against $40,706</a:t>
             </a:r>
           </a:p>
         </p:txBody>
@@ -9375,7 +9375,7 @@
                 </a:solidFill>
                 <a:latin typeface="Roboto"/>
               </a:rPr>
-              <a:t>43.6%</a:t>
+              <a:t>48.0%</a:t>
             </a:r>
           </a:p>
         </p:txBody>
@@ -9414,7 +9414,7 @@
                 </a:solidFill>
                 <a:latin typeface="Roboto"/>
               </a:rPr>
-              <a:t>$23,566 before overheads</a:t>
+              <a:t>$28,147 before overheads</a:t>
             </a:r>
           </a:p>
         </p:txBody>
@@ -9559,7 +9559,7 @@
                 </a:solidFill>
                 <a:latin typeface="Roboto"/>
               </a:rPr>
-              <a:t>Call-outs and repairs brought in $54,052 this financial year to date, 44.0% on the same period last year (faster than the business as a whole, 14.2%), at a 43.6% gross margin (above the 38.9% overall).</a:t>
+              <a:t>Call-outs and repairs brought in $58,633 this financial year to date, 44.0% on the same period last year (faster than the business as a whole, 14.1%), at a 48.0% gross margin (above the 45.2% overall).</a:t>
             </a:r>
           </a:p>
         </p:txBody>
@@ -9686,7 +9686,7 @@
                 </a:solidFill>
                 <a:latin typeface="Roboto"/>
               </a:rPr>
-              <a:t>Call-outs and repairs: 43.6% gross margin, 8.6 points over the 35.0% target ($4,648 ahead on $54,052 this financial year to date).</a:t>
+              <a:t>Call-outs and repairs: 48.0% gross margin, 13.0 points over the 35.0% target ($7,625 ahead on $58,633 this financial year to date).</a:t>
             </a:r>
           </a:p>
         </p:txBody>
@@ -9764,7 +9764,7 @@
                 </a:solidFill>
                 <a:latin typeface="Roboto"/>
               </a:rPr>
-              <a:t>Data retrieved 2pm, Tue 6 Oct 2026 · Generated 8 Oct 2026, 9:35am · Sample data · Made with Python (python-pptx)</a:t>
+              <a:t>Data retrieved 2pm, Tue 6 Oct 2026 · Generated 9 Oct 2026, 8:41am · Sample data · Made with Python (python-pptx)</a:t>
             </a:r>
           </a:p>
         </p:txBody>
@@ -9983,7 +9983,7 @@
                 </a:solidFill>
                 <a:latin typeface="Roboto"/>
               </a:rPr>
-              <a:t>From gross margin to profit: August's jobs made $73,637 gross margin (41.1%). Technician time not charged to jobs took $10,060 and overheads $59,500, leaving $4,077 profit before tax (2.3% of revenue). To cover overheads, jobs need a 38.9% gross margin on average.</a:t>
+              <a:t>From gross margin to profit: August's jobs made $94,153 gross margin (47.2%). Technician time not charged to jobs took $27,812 and overheads $59,500, leaving $6,841 profit before tax (3.4% of revenue). To cover overheads, jobs need a 43.8% gross margin on average.</a:t>
             </a:r>
           </a:p>
         </p:txBody>
@@ -10214,7 +10214,7 @@
                           </a:solidFill>
                           <a:latin typeface="Roboto"/>
                         </a:rPr>
-                        <a:t>$81,000</a:t>
+                        <a:t>$90,700</a:t>
                       </a:r>
                     </a:p>
                   </a:txBody>
@@ -10241,7 +10241,7 @@
                           </a:solidFill>
                           <a:latin typeface="Roboto"/>
                         </a:rPr>
-                        <a:t>$66,400</a:t>
+                        <a:t>$74,400</a:t>
                       </a:r>
                     </a:p>
                   </a:txBody>
@@ -10268,7 +10268,7 @@
                           </a:solidFill>
                           <a:latin typeface="Roboto"/>
                         </a:rPr>
-                        <a:t>22.0%</a:t>
+                        <a:t>21.9%</a:t>
                       </a:r>
                     </a:p>
                   </a:txBody>
@@ -10295,7 +10295,7 @@
                           </a:solidFill>
                           <a:latin typeface="Roboto"/>
                         </a:rPr>
-                        <a:t>$48,232</a:t>
+                        <a:t>$57,932</a:t>
                       </a:r>
                     </a:p>
                   </a:txBody>
@@ -10322,7 +10322,7 @@
                           </a:solidFill>
                           <a:latin typeface="Roboto"/>
                         </a:rPr>
-                        <a:t>59.5%</a:t>
+                        <a:t>63.9%</a:t>
                       </a:r>
                     </a:p>
                   </a:txBody>
@@ -10378,7 +10378,7 @@
                           </a:solidFill>
                           <a:latin typeface="Roboto"/>
                         </a:rPr>
-                        <a:t>$237,200</a:t>
+                        <a:t>$265,800</a:t>
                       </a:r>
                     </a:p>
                   </a:txBody>
@@ -10405,7 +10405,7 @@
                           </a:solidFill>
                           <a:latin typeface="Roboto"/>
                         </a:rPr>
-                        <a:t>$222,000</a:t>
+                        <a:t>$248,600</a:t>
                       </a:r>
                     </a:p>
                   </a:txBody>
@@ -10432,7 +10432,7 @@
                           </a:solidFill>
                           <a:latin typeface="Roboto"/>
                         </a:rPr>
-                        <a:t>6.8%</a:t>
+                        <a:t>6.9%</a:t>
                       </a:r>
                     </a:p>
                   </a:txBody>
@@ -10459,7 +10459,7 @@
                           </a:solidFill>
                           <a:latin typeface="Roboto"/>
                         </a:rPr>
-                        <a:t>$72,960</a:t>
+                        <a:t>$101,560</a:t>
                       </a:r>
                     </a:p>
                   </a:txBody>
@@ -10486,7 +10486,7 @@
                           </a:solidFill>
                           <a:latin typeface="Roboto"/>
                         </a:rPr>
-                        <a:t>30.8%</a:t>
+                        <a:t>38.2%</a:t>
                       </a:r>
                     </a:p>
                   </a:txBody>
@@ -10542,7 +10542,7 @@
                           </a:solidFill>
                           <a:latin typeface="Roboto"/>
                         </a:rPr>
-                        <a:t>$54,052</a:t>
+                        <a:t>$58,633</a:t>
                       </a:r>
                     </a:p>
                   </a:txBody>
@@ -10569,7 +10569,7 @@
                           </a:solidFill>
                           <a:latin typeface="Roboto"/>
                         </a:rPr>
-                        <a:t>$37,524</a:t>
+                        <a:t>$40,706</a:t>
                       </a:r>
                     </a:p>
                   </a:txBody>
@@ -10623,7 +10623,7 @@
                           </a:solidFill>
                           <a:latin typeface="Roboto"/>
                         </a:rPr>
-                        <a:t>$23,566</a:t>
+                        <a:t>$28,147</a:t>
                       </a:r>
                     </a:p>
                   </a:txBody>
@@ -10650,7 +10650,7 @@
                           </a:solidFill>
                           <a:latin typeface="Roboto"/>
                         </a:rPr>
-                        <a:t>43.6%</a:t>
+                        <a:t>48.0%</a:t>
                       </a:r>
                     </a:p>
                   </a:txBody>
@@ -10706,7 +10706,7 @@
                           </a:solidFill>
                           <a:latin typeface="Roboto"/>
                         </a:rPr>
-                        <a:t>$372,252</a:t>
+                        <a:t>$415,133</a:t>
                       </a:r>
                     </a:p>
                   </a:txBody>
@@ -10733,7 +10733,7 @@
                           </a:solidFill>
                           <a:latin typeface="Roboto"/>
                         </a:rPr>
-                        <a:t>$325,924</a:t>
+                        <a:t>$363,706</a:t>
                       </a:r>
                     </a:p>
                   </a:txBody>
@@ -10760,7 +10760,7 @@
                           </a:solidFill>
                           <a:latin typeface="Roboto"/>
                         </a:rPr>
-                        <a:t>14.2%</a:t>
+                        <a:t>14.1%</a:t>
                       </a:r>
                     </a:p>
                   </a:txBody>
@@ -10787,7 +10787,7 @@
                           </a:solidFill>
                           <a:latin typeface="Roboto"/>
                         </a:rPr>
-                        <a:t>$144,758</a:t>
+                        <a:t>$187,639</a:t>
                       </a:r>
                     </a:p>
                   </a:txBody>
@@ -10814,7 +10814,7 @@
                           </a:solidFill>
                           <a:latin typeface="Roboto"/>
                         </a:rPr>
-                        <a:t>38.9%</a:t>
+                        <a:t>45.2%</a:t>
                       </a:r>
                     </a:p>
                   </a:txBody>
@@ -10902,7 +10902,7 @@
                 </a:solidFill>
                 <a:latin typeface="Roboto"/>
               </a:rPr>
-              <a:t>Data retrieved 2pm, Tue 6 Oct 2026 · Generated 8 Oct 2026, 9:35am · Sample data · Made with Python (python-pptx)</a:t>
+              <a:t>Data retrieved 2pm, Tue 6 Oct 2026 · Generated 9 Oct 2026, 8:41am · Sample data · Made with Python (python-pptx)</a:t>
             </a:r>
           </a:p>
         </p:txBody>
